--- a/decks/10-financial-mcp.pptx
+++ b/decks/10-financial-mcp.pptx
@@ -2,21 +2,21 @@
 <file path=ppt/presentation.xml><?xml version="1.0" encoding="utf-8"?>
 <p:presentation xmlns:p="http://schemas.openxmlformats.org/presentationml/2006/main">
   <p:sldMasterIdLst>
-    <p:sldMasterId xmlns:r="http://schemas.openxmlformats.org/officeDocument/2006/relationships" id="2147483648" r:id="Rf1cec187b0974e44"/>
+    <p:sldMasterId xmlns:r="http://schemas.openxmlformats.org/officeDocument/2006/relationships" id="2147483648" r:id="R9b019339bfef4374"/>
   </p:sldMasterIdLst>
   <p:notesMasterIdLst>
-    <p:notesMasterId xmlns:r="http://schemas.openxmlformats.org/officeDocument/2006/relationships" r:id="Rf07b1a3f617d48e2"/>
+    <p:notesMasterId xmlns:r="http://schemas.openxmlformats.org/officeDocument/2006/relationships" r:id="R1a72bae5d9244703"/>
   </p:notesMasterIdLst>
   <p:sldIdLst>
-    <p:sldId xmlns:r="http://schemas.openxmlformats.org/officeDocument/2006/relationships" id="256" r:id="R87f43d056bbd4979"/>
-    <p:sldId xmlns:r="http://schemas.openxmlformats.org/officeDocument/2006/relationships" id="257" r:id="R4ca5d7f16b4e458f"/>
-    <p:sldId xmlns:r="http://schemas.openxmlformats.org/officeDocument/2006/relationships" id="258" r:id="Redbe858add714ed9"/>
-    <p:sldId xmlns:r="http://schemas.openxmlformats.org/officeDocument/2006/relationships" id="259" r:id="R46ca3e9e3b5b42a2"/>
-    <p:sldId xmlns:r="http://schemas.openxmlformats.org/officeDocument/2006/relationships" id="260" r:id="Rd105bd7d2b3746a2"/>
-    <p:sldId xmlns:r="http://schemas.openxmlformats.org/officeDocument/2006/relationships" id="261" r:id="R50e217fda75e49e2"/>
-    <p:sldId xmlns:r="http://schemas.openxmlformats.org/officeDocument/2006/relationships" id="262" r:id="Rb2ba63736d6c401c"/>
-    <p:sldId xmlns:r="http://schemas.openxmlformats.org/officeDocument/2006/relationships" id="263" r:id="Re44ce5ae02bf4926"/>
-    <p:sldId xmlns:r="http://schemas.openxmlformats.org/officeDocument/2006/relationships" id="264" r:id="Rc7df9206b87a4469"/>
+    <p:sldId xmlns:r="http://schemas.openxmlformats.org/officeDocument/2006/relationships" id="256" r:id="R3623f8762c0041c3"/>
+    <p:sldId xmlns:r="http://schemas.openxmlformats.org/officeDocument/2006/relationships" id="257" r:id="Rad5febee051240ff"/>
+    <p:sldId xmlns:r="http://schemas.openxmlformats.org/officeDocument/2006/relationships" id="258" r:id="R7d9997dcff7749b9"/>
+    <p:sldId xmlns:r="http://schemas.openxmlformats.org/officeDocument/2006/relationships" id="259" r:id="Reb19b30c03c14543"/>
+    <p:sldId xmlns:r="http://schemas.openxmlformats.org/officeDocument/2006/relationships" id="260" r:id="R50fd9e211df84aa7"/>
+    <p:sldId xmlns:r="http://schemas.openxmlformats.org/officeDocument/2006/relationships" id="261" r:id="Rd0e253d17a524620"/>
+    <p:sldId xmlns:r="http://schemas.openxmlformats.org/officeDocument/2006/relationships" id="262" r:id="Rfff2d324a72d449e"/>
+    <p:sldId xmlns:r="http://schemas.openxmlformats.org/officeDocument/2006/relationships" id="263" r:id="Rec8f73c88f1140c7"/>
+    <p:sldId xmlns:r="http://schemas.openxmlformats.org/officeDocument/2006/relationships" id="264" r:id="Rcf5c0bbebbcc4a35"/>
   </p:sldIdLst>
   <p:sldSz cx="15240000" cy="8572500"/>
   <p:notesSz cx="6858000" cy="9144000"/>
@@ -1213,7 +1213,7 @@
   </p:cSld>
   <p:clrMap bg1="lt1" tx1="dk1" bg2="lt2" tx2="dk2" accent1="accent1" accent2="accent2" accent3="accent3" accent4="accent4" accent5="accent5" accent6="accent6" hlink="hlink" folHlink="folHlink"/>
   <p:sldLayoutIdLst>
-    <p:sldLayoutId xmlns:r="http://schemas.openxmlformats.org/officeDocument/2006/relationships" id="2147483649" r:id="R2c80a9b087e74b4c"/>
+    <p:sldLayoutId xmlns:r="http://schemas.openxmlformats.org/officeDocument/2006/relationships" id="2147483649" r:id="R8d5af308b7a3451d"/>
   </p:sldLayoutIdLst>
   <p:txStyles>
     <p:titleStyle>
@@ -5807,7 +5807,7 @@
                 <a:ea typeface="Calibri"/>
                 <a:cs typeface="Calibri"/>
               </a:rPr>
-              <a:t>application</a:t>
+              <a:t>application controls</a:t>
             </a:r>
           </a:p>
         </p:txBody>
@@ -6098,7 +6098,7 @@
                 <a:ea typeface="Calibri"/>
                 <a:cs typeface="Calibri"/>
               </a:rPr>
-              <a:t>host</a:t>
+              <a:t>context</a:t>
             </a:r>
           </a:p>
         </p:txBody>
@@ -6160,7 +6160,7 @@
                 <a:ea typeface="Calibri"/>
                 <a:cs typeface="Calibri"/>
               </a:rPr>
-              <a:t>control</a:t>
+              <a:t>resource</a:t>
             </a:r>
           </a:p>
         </p:txBody>
@@ -7940,7 +7940,7 @@
                 <a:ea typeface="Calibri"/>
                 <a:cs typeface="Calibri"/>
               </a:rPr>
-              <a:t>TOOLS</a:t>
+              <a:t>READ ONLY</a:t>
             </a:r>
           </a:p>
         </p:txBody>
@@ -8002,7 +8002,7 @@
                 <a:ea typeface="Calibri"/>
                 <a:cs typeface="Calibri"/>
               </a:rPr>
-              <a:t>get_company_metric</a:t>
+              <a:t>PROMPT</a:t>
             </a:r>
           </a:p>
         </p:txBody>
@@ -8099,7 +8099,7 @@
                 <a:ea typeface="Calibri"/>
                 <a:cs typeface="Calibri"/>
               </a:rPr>
-              <a:t>metric lookup</a:t>
+              <a:t>compare_companies</a:t>
             </a:r>
           </a:p>
         </p:txBody>
@@ -8196,7 +8196,7 @@
                 <a:ea typeface="Calibri"/>
                 <a:cs typeface="Calibri"/>
               </a:rPr>
-              <a:t>document search</a:t>
+              <a:t>user controlled</a:t>
             </a:r>
           </a:p>
         </p:txBody>
@@ -8293,7 +8293,7 @@
                 <a:ea typeface="Calibri"/>
                 <a:cs typeface="Calibri"/>
               </a:rPr>
-              <a:t>host approved</a:t>
+              <a:t>1</a:t>
             </a:r>
           </a:p>
         </p:txBody>
@@ -8355,7 +8355,7 @@
                 <a:ea typeface="Calibri"/>
                 <a:cs typeface="Calibri"/>
               </a:rPr>
-              <a:t>2</a:t>
+              <a:t>USER</a:t>
             </a:r>
           </a:p>
         </p:txBody>
@@ -8417,7 +8417,7 @@
                 <a:ea typeface="Calibri"/>
                 <a:cs typeface="Calibri"/>
               </a:rPr>
-              <a:t>PROMPT</a:t>
+              <a:t>TOOLS</a:t>
             </a:r>
           </a:p>
         </p:txBody>
@@ -8514,7 +8514,7 @@
                 <a:ea typeface="Calibri"/>
                 <a:cs typeface="Calibri"/>
               </a:rPr>
-              <a:t>compare_companies</a:t>
+              <a:t>get_company_metric</a:t>
             </a:r>
           </a:p>
         </p:txBody>
@@ -8611,7 +8611,7 @@
                 <a:ea typeface="Calibri"/>
                 <a:cs typeface="Calibri"/>
               </a:rPr>
-              <a:t>user controlled</a:t>
+              <a:t>search_financial_documents</a:t>
             </a:r>
           </a:p>
         </p:txBody>
@@ -8673,7 +8673,7 @@
                 <a:ea typeface="Calibri"/>
                 <a:cs typeface="Calibri"/>
               </a:rPr>
-              <a:t>1</a:t>
+              <a:t>2</a:t>
             </a:r>
           </a:p>
         </p:txBody>
@@ -11450,7 +11450,8 @@
                 <a:ea typeface="Calibri"/>
                 <a:cs typeface="Calibri"/>
               </a:rPr>
-              <a:t>opens stdio</a:t>
+              <a:t>opens stdio
+requests catalog</a:t>
             </a:r>
           </a:p>
         </p:txBody>
@@ -11671,7 +11672,7 @@
                 <a:ea typeface="Calibri"/>
                 <a:cs typeface="Calibri"/>
               </a:rPr>
-              <a:t>lists capabilities</a:t>
+              <a:t>returns catalog</a:t>
             </a:r>
           </a:p>
         </p:txBody>
@@ -12967,7 +12968,7 @@
                 <a:ea typeface="Calibri"/>
                 <a:cs typeface="Calibri"/>
               </a:rPr>
-              <a:t>known tool name</a:t>
+              <a:t>known + allowed</a:t>
             </a:r>
           </a:p>
         </p:txBody>
@@ -13064,7 +13065,7 @@
                 <a:ea typeface="Calibri"/>
                 <a:cs typeface="Calibri"/>
               </a:rPr>
-              <a:t>host policy</a:t>
+              <a:t>PERMIT</a:t>
             </a:r>
           </a:p>
         </p:txBody>
@@ -13161,7 +13162,7 @@
                 <a:ea typeface="Calibri"/>
                 <a:cs typeface="Calibri"/>
               </a:rPr>
-              <a:t>unknown tool</a:t>
+              <a:t>unknown</a:t>
             </a:r>
           </a:p>
         </p:txBody>
@@ -13320,7 +13321,7 @@
                 <a:ea typeface="Calibri"/>
                 <a:cs typeface="Calibri"/>
               </a:rPr>
-              <a:t>PERMIT</a:t>
+              <a:t>ALLOWLIST</a:t>
             </a:r>
           </a:p>
         </p:txBody>
@@ -13479,7 +13480,7 @@
                 <a:ea typeface="Calibri"/>
                 <a:cs typeface="Calibri"/>
               </a:rPr>
-              <a:t>safe arguments</a:t>
+              <a:t>valid args</a:t>
             </a:r>
           </a:p>
         </p:txBody>
@@ -13576,7 +13577,7 @@
                 <a:ea typeface="Calibri"/>
                 <a:cs typeface="Calibri"/>
               </a:rPr>
-              <a:t>typed input</a:t>
+              <a:t>RUN</a:t>
             </a:r>
           </a:p>
         </p:txBody>
@@ -13673,7 +13674,7 @@
                 <a:ea typeface="Calibri"/>
                 <a:cs typeface="Calibri"/>
               </a:rPr>
-              <a:t>bad request</a:t>
+              <a:t>invalid args</a:t>
             </a:r>
           </a:p>
         </p:txBody>

--- a/decks/10-financial-mcp.pptx
+++ b/decks/10-financial-mcp.pptx
@@ -2,21 +2,23 @@
 <file path=ppt/presentation.xml><?xml version="1.0" encoding="utf-8"?>
 <p:presentation xmlns:p="http://schemas.openxmlformats.org/presentationml/2006/main">
   <p:sldMasterIdLst>
-    <p:sldMasterId xmlns:r="http://schemas.openxmlformats.org/officeDocument/2006/relationships" id="2147483648" r:id="R9b019339bfef4374"/>
+    <p:sldMasterId xmlns:r="http://schemas.openxmlformats.org/officeDocument/2006/relationships" id="2147483648" r:id="Raf0c690725a8488b"/>
   </p:sldMasterIdLst>
   <p:notesMasterIdLst>
-    <p:notesMasterId xmlns:r="http://schemas.openxmlformats.org/officeDocument/2006/relationships" r:id="R1a72bae5d9244703"/>
+    <p:notesMasterId xmlns:r="http://schemas.openxmlformats.org/officeDocument/2006/relationships" r:id="Rae45b237cb9e45c0"/>
   </p:notesMasterIdLst>
   <p:sldIdLst>
-    <p:sldId xmlns:r="http://schemas.openxmlformats.org/officeDocument/2006/relationships" id="256" r:id="R3623f8762c0041c3"/>
-    <p:sldId xmlns:r="http://schemas.openxmlformats.org/officeDocument/2006/relationships" id="257" r:id="Rad5febee051240ff"/>
-    <p:sldId xmlns:r="http://schemas.openxmlformats.org/officeDocument/2006/relationships" id="258" r:id="R7d9997dcff7749b9"/>
-    <p:sldId xmlns:r="http://schemas.openxmlformats.org/officeDocument/2006/relationships" id="259" r:id="Reb19b30c03c14543"/>
-    <p:sldId xmlns:r="http://schemas.openxmlformats.org/officeDocument/2006/relationships" id="260" r:id="R50fd9e211df84aa7"/>
-    <p:sldId xmlns:r="http://schemas.openxmlformats.org/officeDocument/2006/relationships" id="261" r:id="Rd0e253d17a524620"/>
-    <p:sldId xmlns:r="http://schemas.openxmlformats.org/officeDocument/2006/relationships" id="262" r:id="Rfff2d324a72d449e"/>
-    <p:sldId xmlns:r="http://schemas.openxmlformats.org/officeDocument/2006/relationships" id="263" r:id="Rec8f73c88f1140c7"/>
-    <p:sldId xmlns:r="http://schemas.openxmlformats.org/officeDocument/2006/relationships" id="264" r:id="Rcf5c0bbebbcc4a35"/>
+    <p:sldId xmlns:r="http://schemas.openxmlformats.org/officeDocument/2006/relationships" id="256" r:id="R5ab65a08dd224f07"/>
+    <p:sldId xmlns:r="http://schemas.openxmlformats.org/officeDocument/2006/relationships" id="257" r:id="R4c4d91d7e29a4be5"/>
+    <p:sldId xmlns:r="http://schemas.openxmlformats.org/officeDocument/2006/relationships" id="258" r:id="R386e1693b0c94267"/>
+    <p:sldId xmlns:r="http://schemas.openxmlformats.org/officeDocument/2006/relationships" id="259" r:id="R396e37d458fc415f"/>
+    <p:sldId xmlns:r="http://schemas.openxmlformats.org/officeDocument/2006/relationships" id="260" r:id="R079ee4f9e9694392"/>
+    <p:sldId xmlns:r="http://schemas.openxmlformats.org/officeDocument/2006/relationships" id="261" r:id="R118ba56b344b41ca"/>
+    <p:sldId xmlns:r="http://schemas.openxmlformats.org/officeDocument/2006/relationships" id="262" r:id="R7528df99dc524de3"/>
+    <p:sldId xmlns:r="http://schemas.openxmlformats.org/officeDocument/2006/relationships" id="263" r:id="R13b84ae3a95d4a93"/>
+    <p:sldId xmlns:r="http://schemas.openxmlformats.org/officeDocument/2006/relationships" id="264" r:id="Ref6d0aaa16ed49e4"/>
+    <p:sldId xmlns:r="http://schemas.openxmlformats.org/officeDocument/2006/relationships" id="265" r:id="R38779ebfb4c544ae"/>
+    <p:sldId xmlns:r="http://schemas.openxmlformats.org/officeDocument/2006/relationships" id="266" r:id="R4ac8c0fb4ffb49eb"/>
   </p:sldIdLst>
   <p:sldSz cx="15240000" cy="8572500"/>
   <p:notesSz cx="6858000" cy="9144000"/>
@@ -495,6 +497,196 @@
 </p:notes>
 </file>
 
+<file path=ppt/notesSlides/notesSlide10.xml><?xml version="1.0" encoding="utf-8"?>
+<p:notes xmlns:p="http://schemas.openxmlformats.org/presentationml/2006/main">
+  <p:cSld>
+    <p:spTree>
+      <p:nvGrpSpPr>
+        <p:cNvPr id="1" name=""/>
+        <p:cNvGrpSpPr/>
+        <p:nvPr/>
+      </p:nvGrpSpPr>
+      <p:grpSpPr>
+        <a:xfrm xmlns:a="http://schemas.openxmlformats.org/drawingml/2006/main"/>
+      </p:grpSpPr>
+      <p:sp>
+        <p:nvSpPr>
+          <p:cNvPr id="2" name="Slide Image Placeholder 1"/>
+          <p:cNvSpPr>
+            <a:spLocks xmlns:a="http://schemas.openxmlformats.org/drawingml/2006/main" noGrp="1"/>
+          </p:cNvSpPr>
+          <p:nvPr>
+            <p:ph type="sldImg" idx="0"/>
+          </p:nvPr>
+        </p:nvSpPr>
+        <p:spPr/>
+      </p:sp>
+      <p:sp>
+        <p:nvSpPr>
+          <p:cNvPr id="3" name="Notes Placeholder 2"/>
+          <p:cNvSpPr>
+            <a:spLocks xmlns:a="http://schemas.openxmlformats.org/drawingml/2006/main" noGrp="1"/>
+          </p:cNvSpPr>
+          <p:nvPr>
+            <p:ph type="body" idx="1"/>
+          </p:nvPr>
+        </p:nvSpPr>
+        <p:spPr/>
+        <p:txBody>
+          <a:bodyPr xmlns:a="http://schemas.openxmlformats.org/drawingml/2006/main"/>
+          <a:lstStyle xmlns:a="http://schemas.openxmlformats.org/drawingml/2006/main"/>
+          <a:p xmlns:a="http://schemas.openxmlformats.org/drawingml/2006/main">
+            <a:r>
+              <a:t>Instructor purpose: Check the three core decisions before the lesson closes.</a:t>
+            </a:r>
+          </a:p>
+          <a:p xmlns:a="http://schemas.openxmlformats.org/drawingml/2006/main">
+            <a:r>
+              <a:t>Planned timing: 3 minutes.</a:t>
+            </a:r>
+          </a:p>
+          <a:p xmlns:a="http://schemas.openxmlformats.org/drawingml/2006/main">
+            <a:r>
+              <a:t>Facilitation: ask for one letter per question.</a:t>
+            </a:r>
+          </a:p>
+          <a:p xmlns:a="http://schemas.openxmlformats.org/drawingml/2006/main">
+            <a:r>
+              <a:t>[Sources]</a:t>
+            </a:r>
+          </a:p>
+          <a:p xmlns:a="http://schemas.openxmlformats.org/drawingml/2006/main">
+            <a:r>
+              <a:t>- chapters/10-financial-mcp.md</a:t>
+            </a:r>
+          </a:p>
+          <a:p xmlns:a="http://schemas.openxmlformats.org/drawingml/2006/main">
+            <a:r>
+              <a:t>[/Sources]</a:t>
+            </a:r>
+          </a:p>
+        </p:txBody>
+      </p:sp>
+      <p:sp>
+        <p:nvSpPr>
+          <p:cNvPr id="4" name="Slide Number Placeholder 3"/>
+          <p:cNvSpPr>
+            <a:spLocks xmlns:a="http://schemas.openxmlformats.org/drawingml/2006/main" noGrp="1"/>
+          </p:cNvSpPr>
+          <p:nvPr>
+            <p:ph type="sldNum" idx="5"/>
+          </p:nvPr>
+        </p:nvSpPr>
+        <p:spPr/>
+        <p:txBody>
+          <a:bodyPr xmlns:a="http://schemas.openxmlformats.org/drawingml/2006/main"/>
+          <a:lstStyle xmlns:a="http://schemas.openxmlformats.org/drawingml/2006/main"/>
+          <a:p xmlns:a="http://schemas.openxmlformats.org/drawingml/2006/main"/>
+        </p:txBody>
+      </p:sp>
+    </p:spTree>
+  </p:cSld>
+  <p:clrMapOvr>
+    <a:masterClrMapping xmlns:a="http://schemas.openxmlformats.org/drawingml/2006/main"/>
+  </p:clrMapOvr>
+</p:notes>
+</file>
+
+<file path=ppt/notesSlides/notesSlide11.xml><?xml version="1.0" encoding="utf-8"?>
+<p:notes xmlns:p="http://schemas.openxmlformats.org/presentationml/2006/main">
+  <p:cSld>
+    <p:spTree>
+      <p:nvGrpSpPr>
+        <p:cNvPr id="1" name=""/>
+        <p:cNvGrpSpPr/>
+        <p:nvPr/>
+      </p:nvGrpSpPr>
+      <p:grpSpPr>
+        <a:xfrm xmlns:a="http://schemas.openxmlformats.org/drawingml/2006/main"/>
+      </p:grpSpPr>
+      <p:sp>
+        <p:nvSpPr>
+          <p:cNvPr id="2" name="Slide Image Placeholder 1"/>
+          <p:cNvSpPr>
+            <a:spLocks xmlns:a="http://schemas.openxmlformats.org/drawingml/2006/main" noGrp="1"/>
+          </p:cNvSpPr>
+          <p:nvPr>
+            <p:ph type="sldImg" idx="0"/>
+          </p:nvPr>
+        </p:nvSpPr>
+        <p:spPr/>
+      </p:sp>
+      <p:sp>
+        <p:nvSpPr>
+          <p:cNvPr id="3" name="Notes Placeholder 2"/>
+          <p:cNvSpPr>
+            <a:spLocks xmlns:a="http://schemas.openxmlformats.org/drawingml/2006/main" noGrp="1"/>
+          </p:cNvSpPr>
+          <p:nvPr>
+            <p:ph type="body" idx="1"/>
+          </p:nvPr>
+        </p:nvSpPr>
+        <p:spPr/>
+        <p:txBody>
+          <a:bodyPr xmlns:a="http://schemas.openxmlformats.org/drawingml/2006/main"/>
+          <a:lstStyle xmlns:a="http://schemas.openxmlformats.org/drawingml/2006/main"/>
+          <a:p xmlns:a="http://schemas.openxmlformats.org/drawingml/2006/main">
+            <a:r>
+              <a:t>Instructor purpose: Correct the quiz and restate the practical rule behind each answer.</a:t>
+            </a:r>
+          </a:p>
+          <a:p xmlns:a="http://schemas.openxmlformats.org/drawingml/2006/main">
+            <a:r>
+              <a:t>Planned timing: 3 minutes.</a:t>
+            </a:r>
+          </a:p>
+          <a:p xmlns:a="http://schemas.openxmlformats.org/drawingml/2006/main">
+            <a:r>
+              <a:t>Facilitation: ask learners to explain each rule in their own words.</a:t>
+            </a:r>
+          </a:p>
+          <a:p xmlns:a="http://schemas.openxmlformats.org/drawingml/2006/main">
+            <a:r>
+              <a:t>[Sources]</a:t>
+            </a:r>
+          </a:p>
+          <a:p xmlns:a="http://schemas.openxmlformats.org/drawingml/2006/main">
+            <a:r>
+              <a:t>- chapters/10-financial-mcp.md</a:t>
+            </a:r>
+          </a:p>
+          <a:p xmlns:a="http://schemas.openxmlformats.org/drawingml/2006/main">
+            <a:r>
+              <a:t>[/Sources]</a:t>
+            </a:r>
+          </a:p>
+        </p:txBody>
+      </p:sp>
+      <p:sp>
+        <p:nvSpPr>
+          <p:cNvPr id="4" name="Slide Number Placeholder 3"/>
+          <p:cNvSpPr>
+            <a:spLocks xmlns:a="http://schemas.openxmlformats.org/drawingml/2006/main" noGrp="1"/>
+          </p:cNvSpPr>
+          <p:nvPr>
+            <p:ph type="sldNum" idx="5"/>
+          </p:nvPr>
+        </p:nvSpPr>
+        <p:spPr/>
+        <p:txBody>
+          <a:bodyPr xmlns:a="http://schemas.openxmlformats.org/drawingml/2006/main"/>
+          <a:lstStyle xmlns:a="http://schemas.openxmlformats.org/drawingml/2006/main"/>
+          <a:p xmlns:a="http://schemas.openxmlformats.org/drawingml/2006/main"/>
+        </p:txBody>
+      </p:sp>
+    </p:spTree>
+  </p:cSld>
+  <p:clrMapOvr>
+    <a:masterClrMapping xmlns:a="http://schemas.openxmlformats.org/drawingml/2006/main"/>
+  </p:clrMapOvr>
+</p:notes>
+</file>
+
 <file path=ppt/notesSlides/notesSlide2.xml><?xml version="1.0" encoding="utf-8"?>
 <p:notes xmlns:p="http://schemas.openxmlformats.org/presentationml/2006/main">
   <p:cSld>
@@ -1213,7 +1405,7 @@
   </p:cSld>
   <p:clrMap bg1="lt1" tx1="dk1" bg2="lt2" tx2="dk2" accent1="accent1" accent2="accent2" accent3="accent3" accent4="accent4" accent5="accent5" accent6="accent6" hlink="hlink" folHlink="folHlink"/>
   <p:sldLayoutIdLst>
-    <p:sldLayoutId xmlns:r="http://schemas.openxmlformats.org/officeDocument/2006/relationships" id="2147483649" r:id="R8d5af308b7a3451d"/>
+    <p:sldLayoutId xmlns:r="http://schemas.openxmlformats.org/officeDocument/2006/relationships" id="2147483649" r:id="R82b5d8037cc04239"/>
   </p:sldLayoutIdLst>
   <p:txStyles>
     <p:titleStyle>
@@ -2112,6 +2304,1350 @@
 </p:sld>
 </file>
 
+<file path=ppt/slides/slide10.xml><?xml version="1.0" encoding="utf-8"?>
+<p:sld xmlns:p="http://schemas.openxmlformats.org/presentationml/2006/main">
+  <p:cSld>
+    <p:bg>
+      <p:bgPr>
+        <a:solidFill xmlns:a="http://schemas.openxmlformats.org/drawingml/2006/main">
+          <a:srgbClr val="F5F5F5"/>
+        </a:solidFill>
+      </p:bgPr>
+    </p:bg>
+    <p:spTree>
+      <p:nvGrpSpPr>
+        <p:cNvPr id="1" name=""/>
+        <p:cNvGrpSpPr/>
+        <p:nvPr/>
+      </p:nvGrpSpPr>
+      <p:grpSpPr>
+        <a:xfrm xmlns:a="http://schemas.openxmlformats.org/drawingml/2006/main"/>
+      </p:grpSpPr>
+      <p:sp>
+        <p:nvSpPr>
+          <p:cNvPr id="7" name="">
+            <a:extLst xmlns:a="http://schemas.openxmlformats.org/drawingml/2006/main">
+              <a:ext uri="{FF2B5EF4-FFF2-40B4-BE49-F238E27FC236}">
+                <a16:creationId xmlns:a16="http://schemas.microsoft.com/office/drawing/2014/main" id="{2E1E88F9-4976-411E-8732-D45BE311BBD2}"/>
+              </a:ext>
+            </a:extLst>
+          </p:cNvPr>
+          <p:cNvSpPr>
+            <a:spLocks xmlns:a="http://schemas.openxmlformats.org/drawingml/2006/main" noGrp="1"/>
+          </p:cNvSpPr>
+          <p:nvPr/>
+        </p:nvSpPr>
+        <p:spPr>
+          <a:xfrm xmlns:a="http://schemas.openxmlformats.org/drawingml/2006/main">
+            <a:off x="971550" y="781050"/>
+            <a:ext cx="1257300" cy="76200"/>
+          </a:xfrm>
+          <a:prstGeom xmlns:a="http://schemas.openxmlformats.org/drawingml/2006/main" prst="rect">
+            <a:avLst/>
+          </a:prstGeom>
+          <a:solidFill xmlns:a="http://schemas.openxmlformats.org/drawingml/2006/main">
+            <a:srgbClr val="00A2EB"/>
+          </a:solidFill>
+          <a:ln xmlns:a="http://schemas.openxmlformats.org/drawingml/2006/main" w="0">
+            <a:solidFill>
+              <a:srgbClr val="00A2EB"/>
+            </a:solidFill>
+            <a:prstDash val="solid"/>
+          </a:ln>
+        </p:spPr>
+      </p:sp>
+      <p:sp>
+        <p:nvSpPr>
+          <p:cNvPr id="2" name="">
+            <a:extLst xmlns:a="http://schemas.openxmlformats.org/drawingml/2006/main">
+              <a:ext uri="{FF2B5EF4-FFF2-40B4-BE49-F238E27FC236}">
+                <a16:creationId xmlns:a16="http://schemas.microsoft.com/office/drawing/2014/main" id="{35C43047-00B1-4B7A-BB36-D272D2C9B6CA}"/>
+              </a:ext>
+            </a:extLst>
+          </p:cNvPr>
+          <p:cNvSpPr>
+            <a:spLocks xmlns:a="http://schemas.openxmlformats.org/drawingml/2006/main" noGrp="1"/>
+          </p:cNvSpPr>
+          <p:nvPr/>
+        </p:nvSpPr>
+        <p:spPr>
+          <a:xfrm xmlns:a="http://schemas.openxmlformats.org/drawingml/2006/main">
+            <a:off x="971550" y="1066800"/>
+            <a:ext cx="2857500" cy="419100"/>
+          </a:xfrm>
+          <a:prstGeom xmlns:a="http://schemas.openxmlformats.org/drawingml/2006/main" prst="rect">
+            <a:avLst/>
+          </a:prstGeom>
+          <a:noFill xmlns:a="http://schemas.openxmlformats.org/drawingml/2006/main"/>
+          <a:ln xmlns:a="http://schemas.openxmlformats.org/drawingml/2006/main" w="0">
+            <a:noFill/>
+            <a:prstDash val="solid"/>
+          </a:ln>
+        </p:spPr>
+        <p:txBody>
+          <a:bodyPr xmlns:a="http://schemas.openxmlformats.org/drawingml/2006/main" wrap="square" lIns="0" tIns="0" rIns="0" bIns="0" anchor="ctr">
+            <a:normAutofit fontScale="100000"/>
+          </a:bodyPr>
+          <a:lstStyle xmlns:a="http://schemas.openxmlformats.org/drawingml/2006/main"/>
+          <a:p xmlns:a="http://schemas.openxmlformats.org/drawingml/2006/main">
+            <a:pPr algn="l">
+              <a:lnSpc>
+                <a:spcPct val="100000"/>
+              </a:lnSpc>
+              <a:buNone/>
+              <a:defRPr sz="1575" b="1">
+                <a:solidFill>
+                  <a:srgbClr val="1F40CB"/>
+                </a:solidFill>
+                <a:latin typeface="Calibri"/>
+                <a:ea typeface="Calibri"/>
+                <a:cs typeface="Calibri"/>
+              </a:defRPr>
+            </a:pPr>
+            <a:r>
+              <a:rPr sz="1575" b="1">
+                <a:solidFill>
+                  <a:srgbClr val="1F40CB"/>
+                </a:solidFill>
+                <a:latin typeface="Calibri"/>
+                <a:ea typeface="Calibri"/>
+                <a:cs typeface="Calibri"/>
+              </a:rPr>
+              <a:t>FIRST FINANCE</a:t>
+            </a:r>
+          </a:p>
+        </p:txBody>
+      </p:sp>
+      <p:sp>
+        <p:nvSpPr>
+          <p:cNvPr id="3" name="">
+            <a:extLst xmlns:a="http://schemas.openxmlformats.org/drawingml/2006/main">
+              <a:ext uri="{FF2B5EF4-FFF2-40B4-BE49-F238E27FC236}">
+                <a16:creationId xmlns:a16="http://schemas.microsoft.com/office/drawing/2014/main" id="{2EBB9B00-5773-4D90-9774-8BB7FE35221F}"/>
+              </a:ext>
+            </a:extLst>
+          </p:cNvPr>
+          <p:cNvSpPr>
+            <a:spLocks xmlns:a="http://schemas.openxmlformats.org/drawingml/2006/main" noGrp="1"/>
+          </p:cNvSpPr>
+          <p:nvPr/>
+        </p:nvSpPr>
+        <p:spPr>
+          <a:xfrm xmlns:a="http://schemas.openxmlformats.org/drawingml/2006/main">
+            <a:off x="971550" y="2362200"/>
+            <a:ext cx="13296900" cy="895350"/>
+          </a:xfrm>
+          <a:prstGeom xmlns:a="http://schemas.openxmlformats.org/drawingml/2006/main" prst="rect">
+            <a:avLst/>
+          </a:prstGeom>
+          <a:noFill xmlns:a="http://schemas.openxmlformats.org/drawingml/2006/main"/>
+          <a:ln xmlns:a="http://schemas.openxmlformats.org/drawingml/2006/main" w="0">
+            <a:noFill/>
+            <a:prstDash val="solid"/>
+          </a:ln>
+        </p:spPr>
+        <p:txBody>
+          <a:bodyPr xmlns:a="http://schemas.openxmlformats.org/drawingml/2006/main" wrap="none" lIns="0" tIns="0" rIns="0" bIns="0" anchor="ctr">
+            <a:normAutofit fontScale="100000"/>
+          </a:bodyPr>
+          <a:lstStyle xmlns:a="http://schemas.openxmlformats.org/drawingml/2006/main"/>
+          <a:p xmlns:a="http://schemas.openxmlformats.org/drawingml/2006/main">
+            <a:pPr algn="l">
+              <a:lnSpc>
+                <a:spcPct val="100000"/>
+              </a:lnSpc>
+              <a:buNone/>
+              <a:defRPr sz="4800" b="1">
+                <a:solidFill>
+                  <a:srgbClr val="051C2A"/>
+                </a:solidFill>
+                <a:latin typeface="Calibri"/>
+                <a:ea typeface="Calibri"/>
+                <a:cs typeface="Calibri"/>
+              </a:defRPr>
+            </a:pPr>
+            <a:r>
+              <a:rPr sz="4800" b="1">
+                <a:solidFill>
+                  <a:srgbClr val="051C2A"/>
+                </a:solidFill>
+                <a:latin typeface="Calibri"/>
+                <a:ea typeface="Calibri"/>
+                <a:cs typeface="Calibri"/>
+              </a:rPr>
+              <a:t>Quick quiz</a:t>
+            </a:r>
+          </a:p>
+        </p:txBody>
+      </p:sp>
+      <p:sp>
+        <p:nvSpPr>
+          <p:cNvPr id="4" name="">
+            <a:extLst xmlns:a="http://schemas.openxmlformats.org/drawingml/2006/main">
+              <a:ext uri="{FF2B5EF4-FFF2-40B4-BE49-F238E27FC236}">
+                <a16:creationId xmlns:a16="http://schemas.microsoft.com/office/drawing/2014/main" id="{601F96F8-8EA3-4B69-A3AF-EBD5CBCD09C1}"/>
+              </a:ext>
+            </a:extLst>
+          </p:cNvPr>
+          <p:cNvSpPr>
+            <a:spLocks xmlns:a="http://schemas.openxmlformats.org/drawingml/2006/main" noGrp="1"/>
+          </p:cNvSpPr>
+          <p:nvPr/>
+        </p:nvSpPr>
+        <p:spPr>
+          <a:xfrm xmlns:a="http://schemas.openxmlformats.org/drawingml/2006/main">
+            <a:off x="971550" y="3562350"/>
+            <a:ext cx="11239500" cy="514350"/>
+          </a:xfrm>
+          <a:prstGeom xmlns:a="http://schemas.openxmlformats.org/drawingml/2006/main" prst="rect">
+            <a:avLst/>
+          </a:prstGeom>
+          <a:noFill xmlns:a="http://schemas.openxmlformats.org/drawingml/2006/main"/>
+          <a:ln xmlns:a="http://schemas.openxmlformats.org/drawingml/2006/main" w="0">
+            <a:noFill/>
+            <a:prstDash val="solid"/>
+          </a:ln>
+        </p:spPr>
+        <p:txBody>
+          <a:bodyPr xmlns:a="http://schemas.openxmlformats.org/drawingml/2006/main" wrap="square" lIns="0" tIns="0" rIns="0" bIns="0" anchor="ctr">
+            <a:normAutofit fontScale="100000"/>
+          </a:bodyPr>
+          <a:lstStyle xmlns:a="http://schemas.openxmlformats.org/drawingml/2006/main"/>
+          <a:p xmlns:a="http://schemas.openxmlformats.org/drawingml/2006/main">
+            <a:pPr algn="l">
+              <a:lnSpc>
+                <a:spcPct val="100000"/>
+              </a:lnSpc>
+              <a:buNone/>
+              <a:defRPr sz="2400" b="0">
+                <a:solidFill>
+                  <a:srgbClr val="3F3F42"/>
+                </a:solidFill>
+                <a:latin typeface="Calibri"/>
+                <a:ea typeface="Calibri"/>
+                <a:cs typeface="Calibri"/>
+              </a:defRPr>
+            </a:pPr>
+            <a:r>
+              <a:rPr sz="2400" b="0">
+                <a:solidFill>
+                  <a:srgbClr val="3F3F42"/>
+                </a:solidFill>
+                <a:latin typeface="Calibri"/>
+                <a:ea typeface="Calibri"/>
+                <a:cs typeface="Calibri"/>
+              </a:rPr>
+              <a:t>Choose one answer for each question.</a:t>
+            </a:r>
+          </a:p>
+        </p:txBody>
+      </p:sp>
+      <p:sp>
+        <p:nvSpPr>
+          <p:cNvPr id="5" name="">
+            <a:extLst xmlns:a="http://schemas.openxmlformats.org/drawingml/2006/main">
+              <a:ext uri="{FF2B5EF4-FFF2-40B4-BE49-F238E27FC236}">
+                <a16:creationId xmlns:a16="http://schemas.microsoft.com/office/drawing/2014/main" id="{D4A6E89B-2708-4600-B820-727EF660DE6B}"/>
+              </a:ext>
+            </a:extLst>
+          </p:cNvPr>
+          <p:cNvSpPr>
+            <a:spLocks xmlns:a="http://schemas.openxmlformats.org/drawingml/2006/main" noGrp="1"/>
+          </p:cNvSpPr>
+          <p:nvPr/>
+        </p:nvSpPr>
+        <p:spPr>
+          <a:xfrm xmlns:a="http://schemas.openxmlformats.org/drawingml/2006/main">
+            <a:off x="971550" y="6477000"/>
+            <a:ext cx="9525000" cy="400050"/>
+          </a:xfrm>
+          <a:prstGeom xmlns:a="http://schemas.openxmlformats.org/drawingml/2006/main" prst="rect">
+            <a:avLst/>
+          </a:prstGeom>
+          <a:noFill xmlns:a="http://schemas.openxmlformats.org/drawingml/2006/main"/>
+          <a:ln xmlns:a="http://schemas.openxmlformats.org/drawingml/2006/main" w="0">
+            <a:noFill/>
+            <a:prstDash val="solid"/>
+          </a:ln>
+        </p:spPr>
+        <p:txBody>
+          <a:bodyPr xmlns:a="http://schemas.openxmlformats.org/drawingml/2006/main" wrap="square" lIns="0" tIns="0" rIns="0" bIns="0" anchor="ctr">
+            <a:normAutofit fontScale="100000"/>
+          </a:bodyPr>
+          <a:lstStyle xmlns:a="http://schemas.openxmlformats.org/drawingml/2006/main"/>
+          <a:p xmlns:a="http://schemas.openxmlformats.org/drawingml/2006/main">
+            <a:pPr algn="l">
+              <a:lnSpc>
+                <a:spcPct val="100000"/>
+              </a:lnSpc>
+              <a:buNone/>
+              <a:defRPr sz="1350" b="1">
+                <a:solidFill>
+                  <a:srgbClr val="1F40CB"/>
+                </a:solidFill>
+                <a:latin typeface="Calibri"/>
+                <a:ea typeface="Calibri"/>
+                <a:cs typeface="Calibri"/>
+              </a:defRPr>
+            </a:pPr>
+            <a:r>
+              <a:rPr sz="1350" b="1">
+                <a:solidFill>
+                  <a:srgbClr val="1F40CB"/>
+                </a:solidFill>
+                <a:latin typeface="Calibri"/>
+                <a:ea typeface="Calibri"/>
+                <a:cs typeface="Calibri"/>
+              </a:rPr>
+              <a:t>LESSON 10  ·  3 QUESTIONS  ·  3 MINUTES</a:t>
+            </a:r>
+          </a:p>
+        </p:txBody>
+      </p:sp>
+      <p:sp>
+        <p:nvSpPr>
+          <p:cNvPr id="6" name="">
+            <a:extLst xmlns:a="http://schemas.openxmlformats.org/drawingml/2006/main">
+              <a:ext uri="{FF2B5EF4-FFF2-40B4-BE49-F238E27FC236}">
+                <a16:creationId xmlns:a16="http://schemas.microsoft.com/office/drawing/2014/main" id="{053831D6-7D46-4F1A-929F-D2CAD97F1627}"/>
+              </a:ext>
+            </a:extLst>
+          </p:cNvPr>
+          <p:cNvSpPr>
+            <a:spLocks xmlns:a="http://schemas.openxmlformats.org/drawingml/2006/main" noGrp="1"/>
+          </p:cNvSpPr>
+          <p:nvPr/>
+        </p:nvSpPr>
+        <p:spPr>
+          <a:xfrm xmlns:a="http://schemas.openxmlformats.org/drawingml/2006/main">
+            <a:off x="971550" y="7067550"/>
+            <a:ext cx="4762500" cy="381000"/>
+          </a:xfrm>
+          <a:prstGeom xmlns:a="http://schemas.openxmlformats.org/drawingml/2006/main" prst="rect">
+            <a:avLst/>
+          </a:prstGeom>
+          <a:noFill xmlns:a="http://schemas.openxmlformats.org/drawingml/2006/main"/>
+          <a:ln xmlns:a="http://schemas.openxmlformats.org/drawingml/2006/main" w="0">
+            <a:noFill/>
+            <a:prstDash val="solid"/>
+          </a:ln>
+        </p:spPr>
+        <p:txBody>
+          <a:bodyPr xmlns:a="http://schemas.openxmlformats.org/drawingml/2006/main" wrap="square" lIns="0" tIns="0" rIns="0" bIns="0" anchor="ctr">
+            <a:normAutofit fontScale="100000"/>
+          </a:bodyPr>
+          <a:lstStyle xmlns:a="http://schemas.openxmlformats.org/drawingml/2006/main"/>
+          <a:p xmlns:a="http://schemas.openxmlformats.org/drawingml/2006/main">
+            <a:pPr algn="l">
+              <a:lnSpc>
+                <a:spcPct val="100000"/>
+              </a:lnSpc>
+              <a:buNone/>
+              <a:defRPr sz="1725" b="0">
+                <a:solidFill>
+                  <a:srgbClr val="051C2A"/>
+                </a:solidFill>
+                <a:latin typeface="Calibri"/>
+                <a:ea typeface="Calibri"/>
+                <a:cs typeface="Calibri"/>
+              </a:defRPr>
+            </a:pPr>
+            <a:r>
+              <a:rPr sz="1725" b="0">
+                <a:solidFill>
+                  <a:srgbClr val="051C2A"/>
+                </a:solidFill>
+                <a:latin typeface="Calibri"/>
+                <a:ea typeface="Calibri"/>
+                <a:cs typeface="Calibri"/>
+              </a:rPr>
+              <a:t>First Finance - Arnaud Demes</a:t>
+            </a:r>
+          </a:p>
+        </p:txBody>
+      </p:sp>
+      <p:sp>
+        <p:nvSpPr>
+          <p:cNvPr id="8" name="quiz-question-1">
+            <a:extLst xmlns:a="http://schemas.openxmlformats.org/drawingml/2006/main">
+              <a:ext uri="{FF2B5EF4-FFF2-40B4-BE49-F238E27FC236}">
+                <a16:creationId xmlns:a16="http://schemas.microsoft.com/office/drawing/2014/main" id="{17B5CC66-75DD-43C6-9873-E42B3A70985B}"/>
+              </a:ext>
+            </a:extLst>
+          </p:cNvPr>
+          <p:cNvSpPr>
+            <a:spLocks xmlns:a="http://schemas.openxmlformats.org/drawingml/2006/main" noGrp="1"/>
+          </p:cNvSpPr>
+          <p:nvPr/>
+        </p:nvSpPr>
+        <p:spPr>
+          <a:xfrm xmlns:a="http://schemas.openxmlformats.org/drawingml/2006/main">
+            <a:off x="971550" y="4400550"/>
+            <a:ext cx="13296900" cy="285750"/>
+          </a:xfrm>
+          <a:prstGeom xmlns:a="http://schemas.openxmlformats.org/drawingml/2006/main" prst="rect">
+            <a:avLst/>
+          </a:prstGeom>
+          <a:noFill xmlns:a="http://schemas.openxmlformats.org/drawingml/2006/main"/>
+          <a:ln xmlns:a="http://schemas.openxmlformats.org/drawingml/2006/main" w="0">
+            <a:noFill/>
+            <a:prstDash val="solid"/>
+          </a:ln>
+        </p:spPr>
+        <p:txBody>
+          <a:bodyPr xmlns:a="http://schemas.openxmlformats.org/drawingml/2006/main"/>
+          <a:lstStyle xmlns:a="http://schemas.openxmlformats.org/drawingml/2006/main"/>
+          <a:p xmlns:a="http://schemas.openxmlformats.org/drawingml/2006/main">
+            <a:pPr>
+              <a:defRPr sz="1500" b="1">
+                <a:solidFill>
+                  <a:srgbClr val="001B2E"/>
+                </a:solidFill>
+              </a:defRPr>
+            </a:pPr>
+            <a:r>
+              <a:rPr sz="1500" b="1">
+                <a:solidFill>
+                  <a:srgbClr val="001B2E"/>
+                </a:solidFill>
+              </a:rPr>
+              <a:t>1. Does discovering an MCP tool grant permission to call it?</a:t>
+            </a:r>
+          </a:p>
+        </p:txBody>
+      </p:sp>
+      <p:sp>
+        <p:nvSpPr>
+          <p:cNvPr id="9" name="quiz-options-1">
+            <a:extLst xmlns:a="http://schemas.openxmlformats.org/drawingml/2006/main">
+              <a:ext uri="{FF2B5EF4-FFF2-40B4-BE49-F238E27FC236}">
+                <a16:creationId xmlns:a16="http://schemas.microsoft.com/office/drawing/2014/main" id="{A1D2FDA2-DE28-4C65-AB8E-88510D152E59}"/>
+              </a:ext>
+            </a:extLst>
+          </p:cNvPr>
+          <p:cNvSpPr>
+            <a:spLocks xmlns:a="http://schemas.openxmlformats.org/drawingml/2006/main" noGrp="1"/>
+          </p:cNvSpPr>
+          <p:nvPr/>
+        </p:nvSpPr>
+        <p:spPr>
+          <a:xfrm xmlns:a="http://schemas.openxmlformats.org/drawingml/2006/main">
+            <a:off x="1257300" y="4705350"/>
+            <a:ext cx="13011150" cy="247650"/>
+          </a:xfrm>
+          <a:prstGeom xmlns:a="http://schemas.openxmlformats.org/drawingml/2006/main" prst="rect">
+            <a:avLst/>
+          </a:prstGeom>
+          <a:noFill xmlns:a="http://schemas.openxmlformats.org/drawingml/2006/main"/>
+          <a:ln xmlns:a="http://schemas.openxmlformats.org/drawingml/2006/main" w="0">
+            <a:noFill/>
+            <a:prstDash val="solid"/>
+          </a:ln>
+        </p:spPr>
+        <p:txBody>
+          <a:bodyPr xmlns:a="http://schemas.openxmlformats.org/drawingml/2006/main"/>
+          <a:lstStyle xmlns:a="http://schemas.openxmlformats.org/drawingml/2006/main"/>
+          <a:p xmlns:a="http://schemas.openxmlformats.org/drawingml/2006/main">
+            <a:pPr>
+              <a:defRPr sz="1200" b="0">
+                <a:solidFill>
+                  <a:srgbClr val="334155"/>
+                </a:solidFill>
+              </a:defRPr>
+            </a:pPr>
+            <a:r>
+              <a:rPr sz="1200" b="0">
+                <a:solidFill>
+                  <a:srgbClr val="334155"/>
+                </a:solidFill>
+              </a:rPr>
+              <a:t>A  Yes     |     B  No     |     C  Only locally</a:t>
+            </a:r>
+          </a:p>
+        </p:txBody>
+      </p:sp>
+      <p:sp>
+        <p:nvSpPr>
+          <p:cNvPr id="10" name="quiz-question-2">
+            <a:extLst xmlns:a="http://schemas.openxmlformats.org/drawingml/2006/main">
+              <a:ext uri="{FF2B5EF4-FFF2-40B4-BE49-F238E27FC236}">
+                <a16:creationId xmlns:a16="http://schemas.microsoft.com/office/drawing/2014/main" id="{48ED16F8-77D6-4787-A61A-3FAFCC5935B4}"/>
+              </a:ext>
+            </a:extLst>
+          </p:cNvPr>
+          <p:cNvSpPr>
+            <a:spLocks xmlns:a="http://schemas.openxmlformats.org/drawingml/2006/main" noGrp="1"/>
+          </p:cNvSpPr>
+          <p:nvPr/>
+        </p:nvSpPr>
+        <p:spPr>
+          <a:xfrm xmlns:a="http://schemas.openxmlformats.org/drawingml/2006/main">
+            <a:off x="971550" y="5086350"/>
+            <a:ext cx="13296900" cy="285750"/>
+          </a:xfrm>
+          <a:prstGeom xmlns:a="http://schemas.openxmlformats.org/drawingml/2006/main" prst="rect">
+            <a:avLst/>
+          </a:prstGeom>
+          <a:noFill xmlns:a="http://schemas.openxmlformats.org/drawingml/2006/main"/>
+          <a:ln xmlns:a="http://schemas.openxmlformats.org/drawingml/2006/main" w="0">
+            <a:noFill/>
+            <a:prstDash val="solid"/>
+          </a:ln>
+        </p:spPr>
+        <p:txBody>
+          <a:bodyPr xmlns:a="http://schemas.openxmlformats.org/drawingml/2006/main"/>
+          <a:lstStyle xmlns:a="http://schemas.openxmlformats.org/drawingml/2006/main"/>
+          <a:p xmlns:a="http://schemas.openxmlformats.org/drawingml/2006/main">
+            <a:pPr>
+              <a:defRPr sz="1500" b="1">
+                <a:solidFill>
+                  <a:srgbClr val="001B2E"/>
+                </a:solidFill>
+              </a:defRPr>
+            </a:pPr>
+            <a:r>
+              <a:rPr sz="1500" b="1">
+                <a:solidFill>
+                  <a:srgbClr val="001B2E"/>
+                </a:solidFill>
+              </a:rPr>
+              <a:t>2. Who keeps policy and the final answer?</a:t>
+            </a:r>
+          </a:p>
+        </p:txBody>
+      </p:sp>
+      <p:sp>
+        <p:nvSpPr>
+          <p:cNvPr id="11" name="quiz-options-2">
+            <a:extLst xmlns:a="http://schemas.openxmlformats.org/drawingml/2006/main">
+              <a:ext uri="{FF2B5EF4-FFF2-40B4-BE49-F238E27FC236}">
+                <a16:creationId xmlns:a16="http://schemas.microsoft.com/office/drawing/2014/main" id="{79E028B2-2EE3-4D92-8642-F1573CE6A3AA}"/>
+              </a:ext>
+            </a:extLst>
+          </p:cNvPr>
+          <p:cNvSpPr>
+            <a:spLocks xmlns:a="http://schemas.openxmlformats.org/drawingml/2006/main" noGrp="1"/>
+          </p:cNvSpPr>
+          <p:nvPr/>
+        </p:nvSpPr>
+        <p:spPr>
+          <a:xfrm xmlns:a="http://schemas.openxmlformats.org/drawingml/2006/main">
+            <a:off x="1257300" y="5391150"/>
+            <a:ext cx="13011150" cy="247650"/>
+          </a:xfrm>
+          <a:prstGeom xmlns:a="http://schemas.openxmlformats.org/drawingml/2006/main" prst="rect">
+            <a:avLst/>
+          </a:prstGeom>
+          <a:noFill xmlns:a="http://schemas.openxmlformats.org/drawingml/2006/main"/>
+          <a:ln xmlns:a="http://schemas.openxmlformats.org/drawingml/2006/main" w="0">
+            <a:noFill/>
+            <a:prstDash val="solid"/>
+          </a:ln>
+        </p:spPr>
+        <p:txBody>
+          <a:bodyPr xmlns:a="http://schemas.openxmlformats.org/drawingml/2006/main"/>
+          <a:lstStyle xmlns:a="http://schemas.openxmlformats.org/drawingml/2006/main"/>
+          <a:p xmlns:a="http://schemas.openxmlformats.org/drawingml/2006/main">
+            <a:pPr>
+              <a:defRPr sz="1200" b="0">
+                <a:solidFill>
+                  <a:srgbClr val="334155"/>
+                </a:solidFill>
+              </a:defRPr>
+            </a:pPr>
+            <a:r>
+              <a:rPr sz="1200" b="0">
+                <a:solidFill>
+                  <a:srgbClr val="334155"/>
+                </a:solidFill>
+              </a:rPr>
+              <a:t>A  Host     |     B  MCP server     |     C  Transport</a:t>
+            </a:r>
+          </a:p>
+        </p:txBody>
+      </p:sp>
+      <p:sp>
+        <p:nvSpPr>
+          <p:cNvPr id="12" name="quiz-question-3">
+            <a:extLst xmlns:a="http://schemas.openxmlformats.org/drawingml/2006/main">
+              <a:ext uri="{FF2B5EF4-FFF2-40B4-BE49-F238E27FC236}">
+                <a16:creationId xmlns:a16="http://schemas.microsoft.com/office/drawing/2014/main" id="{C877F1C8-723B-4A79-8AC4-28D8BEAB0A57}"/>
+              </a:ext>
+            </a:extLst>
+          </p:cNvPr>
+          <p:cNvSpPr>
+            <a:spLocks xmlns:a="http://schemas.openxmlformats.org/drawingml/2006/main" noGrp="1"/>
+          </p:cNvSpPr>
+          <p:nvPr/>
+        </p:nvSpPr>
+        <p:spPr>
+          <a:xfrm xmlns:a="http://schemas.openxmlformats.org/drawingml/2006/main">
+            <a:off x="971550" y="5772150"/>
+            <a:ext cx="13296900" cy="285750"/>
+          </a:xfrm>
+          <a:prstGeom xmlns:a="http://schemas.openxmlformats.org/drawingml/2006/main" prst="rect">
+            <a:avLst/>
+          </a:prstGeom>
+          <a:noFill xmlns:a="http://schemas.openxmlformats.org/drawingml/2006/main"/>
+          <a:ln xmlns:a="http://schemas.openxmlformats.org/drawingml/2006/main" w="0">
+            <a:noFill/>
+            <a:prstDash val="solid"/>
+          </a:ln>
+        </p:spPr>
+        <p:txBody>
+          <a:bodyPr xmlns:a="http://schemas.openxmlformats.org/drawingml/2006/main"/>
+          <a:lstStyle xmlns:a="http://schemas.openxmlformats.org/drawingml/2006/main"/>
+          <a:p xmlns:a="http://schemas.openxmlformats.org/drawingml/2006/main">
+            <a:pPr>
+              <a:defRPr sz="1500" b="1">
+                <a:solidFill>
+                  <a:srgbClr val="001B2E"/>
+                </a:solidFill>
+              </a:defRPr>
+            </a:pPr>
+            <a:r>
+              <a:rPr sz="1500" b="1">
+                <a:solidFill>
+                  <a:srgbClr val="001B2E"/>
+                </a:solidFill>
+              </a:rPr>
+              <a:t>3. What does stdio provide?</a:t>
+            </a:r>
+          </a:p>
+        </p:txBody>
+      </p:sp>
+      <p:sp>
+        <p:nvSpPr>
+          <p:cNvPr id="13" name="quiz-options-3">
+            <a:extLst xmlns:a="http://schemas.openxmlformats.org/drawingml/2006/main">
+              <a:ext uri="{FF2B5EF4-FFF2-40B4-BE49-F238E27FC236}">
+                <a16:creationId xmlns:a16="http://schemas.microsoft.com/office/drawing/2014/main" id="{E8198A8E-27CE-4F4B-9B98-68D73683ED2B}"/>
+              </a:ext>
+            </a:extLst>
+          </p:cNvPr>
+          <p:cNvSpPr>
+            <a:spLocks xmlns:a="http://schemas.openxmlformats.org/drawingml/2006/main" noGrp="1"/>
+          </p:cNvSpPr>
+          <p:nvPr/>
+        </p:nvSpPr>
+        <p:spPr>
+          <a:xfrm xmlns:a="http://schemas.openxmlformats.org/drawingml/2006/main">
+            <a:off x="1257300" y="6076950"/>
+            <a:ext cx="13011150" cy="247650"/>
+          </a:xfrm>
+          <a:prstGeom xmlns:a="http://schemas.openxmlformats.org/drawingml/2006/main" prst="rect">
+            <a:avLst/>
+          </a:prstGeom>
+          <a:noFill xmlns:a="http://schemas.openxmlformats.org/drawingml/2006/main"/>
+          <a:ln xmlns:a="http://schemas.openxmlformats.org/drawingml/2006/main" w="0">
+            <a:noFill/>
+            <a:prstDash val="solid"/>
+          </a:ln>
+        </p:spPr>
+        <p:txBody>
+          <a:bodyPr xmlns:a="http://schemas.openxmlformats.org/drawingml/2006/main"/>
+          <a:lstStyle xmlns:a="http://schemas.openxmlformats.org/drawingml/2006/main"/>
+          <a:p xmlns:a="http://schemas.openxmlformats.org/drawingml/2006/main">
+            <a:pPr>
+              <a:defRPr sz="1200" b="0">
+                <a:solidFill>
+                  <a:srgbClr val="334155"/>
+                </a:solidFill>
+              </a:defRPr>
+            </a:pPr>
+            <a:r>
+              <a:rPr sz="1200" b="0">
+                <a:solidFill>
+                  <a:srgbClr val="334155"/>
+                </a:solidFill>
+              </a:rPr>
+              <a:t>A  Local transport     |     B  Authentication     |     C  Investment advice</a:t>
+            </a:r>
+          </a:p>
+        </p:txBody>
+      </p:sp>
+    </p:spTree>
+    <p:extLst>
+      <p:ext uri="{BB962C8B-B14F-4D97-AF65-F5344CB8AC3E}">
+        <p14:creationId xmlns:p14="http://schemas.microsoft.com/office/powerpoint/2010/main" val="1316229138"/>
+      </p:ext>
+    </p:extLst>
+  </p:cSld>
+</p:sld>
+</file>
+
+<file path=ppt/slides/slide11.xml><?xml version="1.0" encoding="utf-8"?>
+<p:sld xmlns:p="http://schemas.openxmlformats.org/presentationml/2006/main">
+  <p:cSld>
+    <p:bg>
+      <p:bgPr>
+        <a:solidFill xmlns:a="http://schemas.openxmlformats.org/drawingml/2006/main">
+          <a:srgbClr val="F5F5F5"/>
+        </a:solidFill>
+      </p:bgPr>
+    </p:bg>
+    <p:spTree>
+      <p:nvGrpSpPr>
+        <p:cNvPr id="1" name=""/>
+        <p:cNvGrpSpPr/>
+        <p:nvPr/>
+      </p:nvGrpSpPr>
+      <p:grpSpPr>
+        <a:xfrm xmlns:a="http://schemas.openxmlformats.org/drawingml/2006/main"/>
+      </p:grpSpPr>
+      <p:sp>
+        <p:nvSpPr>
+          <p:cNvPr id="7" name="">
+            <a:extLst xmlns:a="http://schemas.openxmlformats.org/drawingml/2006/main">
+              <a:ext uri="{FF2B5EF4-FFF2-40B4-BE49-F238E27FC236}">
+                <a16:creationId xmlns:a16="http://schemas.microsoft.com/office/drawing/2014/main" id="{2E1E88F9-4976-411E-8732-D45BE311BBD2}"/>
+              </a:ext>
+            </a:extLst>
+          </p:cNvPr>
+          <p:cNvSpPr>
+            <a:spLocks xmlns:a="http://schemas.openxmlformats.org/drawingml/2006/main" noGrp="1"/>
+          </p:cNvSpPr>
+          <p:nvPr/>
+        </p:nvSpPr>
+        <p:spPr>
+          <a:xfrm xmlns:a="http://schemas.openxmlformats.org/drawingml/2006/main">
+            <a:off x="971550" y="781050"/>
+            <a:ext cx="1257300" cy="76200"/>
+          </a:xfrm>
+          <a:prstGeom xmlns:a="http://schemas.openxmlformats.org/drawingml/2006/main" prst="rect">
+            <a:avLst/>
+          </a:prstGeom>
+          <a:solidFill xmlns:a="http://schemas.openxmlformats.org/drawingml/2006/main">
+            <a:srgbClr val="00A2EB"/>
+          </a:solidFill>
+          <a:ln xmlns:a="http://schemas.openxmlformats.org/drawingml/2006/main" w="0">
+            <a:solidFill>
+              <a:srgbClr val="00A2EB"/>
+            </a:solidFill>
+            <a:prstDash val="solid"/>
+          </a:ln>
+        </p:spPr>
+      </p:sp>
+      <p:sp>
+        <p:nvSpPr>
+          <p:cNvPr id="2" name="">
+            <a:extLst xmlns:a="http://schemas.openxmlformats.org/drawingml/2006/main">
+              <a:ext uri="{FF2B5EF4-FFF2-40B4-BE49-F238E27FC236}">
+                <a16:creationId xmlns:a16="http://schemas.microsoft.com/office/drawing/2014/main" id="{35C43047-00B1-4B7A-BB36-D272D2C9B6CA}"/>
+              </a:ext>
+            </a:extLst>
+          </p:cNvPr>
+          <p:cNvSpPr>
+            <a:spLocks xmlns:a="http://schemas.openxmlformats.org/drawingml/2006/main" noGrp="1"/>
+          </p:cNvSpPr>
+          <p:nvPr/>
+        </p:nvSpPr>
+        <p:spPr>
+          <a:xfrm xmlns:a="http://schemas.openxmlformats.org/drawingml/2006/main">
+            <a:off x="971550" y="1066800"/>
+            <a:ext cx="2857500" cy="419100"/>
+          </a:xfrm>
+          <a:prstGeom xmlns:a="http://schemas.openxmlformats.org/drawingml/2006/main" prst="rect">
+            <a:avLst/>
+          </a:prstGeom>
+          <a:noFill xmlns:a="http://schemas.openxmlformats.org/drawingml/2006/main"/>
+          <a:ln xmlns:a="http://schemas.openxmlformats.org/drawingml/2006/main" w="0">
+            <a:noFill/>
+            <a:prstDash val="solid"/>
+          </a:ln>
+        </p:spPr>
+        <p:txBody>
+          <a:bodyPr xmlns:a="http://schemas.openxmlformats.org/drawingml/2006/main" wrap="square" lIns="0" tIns="0" rIns="0" bIns="0" anchor="ctr">
+            <a:normAutofit fontScale="100000"/>
+          </a:bodyPr>
+          <a:lstStyle xmlns:a="http://schemas.openxmlformats.org/drawingml/2006/main"/>
+          <a:p xmlns:a="http://schemas.openxmlformats.org/drawingml/2006/main">
+            <a:pPr algn="l">
+              <a:lnSpc>
+                <a:spcPct val="100000"/>
+              </a:lnSpc>
+              <a:buNone/>
+              <a:defRPr sz="1575" b="1">
+                <a:solidFill>
+                  <a:srgbClr val="1F40CB"/>
+                </a:solidFill>
+                <a:latin typeface="Calibri"/>
+                <a:ea typeface="Calibri"/>
+                <a:cs typeface="Calibri"/>
+              </a:defRPr>
+            </a:pPr>
+            <a:r>
+              <a:rPr sz="1575" b="1">
+                <a:solidFill>
+                  <a:srgbClr val="1F40CB"/>
+                </a:solidFill>
+                <a:latin typeface="Calibri"/>
+                <a:ea typeface="Calibri"/>
+                <a:cs typeface="Calibri"/>
+              </a:rPr>
+              <a:t>FIRST FINANCE</a:t>
+            </a:r>
+          </a:p>
+        </p:txBody>
+      </p:sp>
+      <p:sp>
+        <p:nvSpPr>
+          <p:cNvPr id="3" name="">
+            <a:extLst xmlns:a="http://schemas.openxmlformats.org/drawingml/2006/main">
+              <a:ext uri="{FF2B5EF4-FFF2-40B4-BE49-F238E27FC236}">
+                <a16:creationId xmlns:a16="http://schemas.microsoft.com/office/drawing/2014/main" id="{2EBB9B00-5773-4D90-9774-8BB7FE35221F}"/>
+              </a:ext>
+            </a:extLst>
+          </p:cNvPr>
+          <p:cNvSpPr>
+            <a:spLocks xmlns:a="http://schemas.openxmlformats.org/drawingml/2006/main" noGrp="1"/>
+          </p:cNvSpPr>
+          <p:nvPr/>
+        </p:nvSpPr>
+        <p:spPr>
+          <a:xfrm xmlns:a="http://schemas.openxmlformats.org/drawingml/2006/main">
+            <a:off x="971550" y="2362200"/>
+            <a:ext cx="13296900" cy="895350"/>
+          </a:xfrm>
+          <a:prstGeom xmlns:a="http://schemas.openxmlformats.org/drawingml/2006/main" prst="rect">
+            <a:avLst/>
+          </a:prstGeom>
+          <a:noFill xmlns:a="http://schemas.openxmlformats.org/drawingml/2006/main"/>
+          <a:ln xmlns:a="http://schemas.openxmlformats.org/drawingml/2006/main" w="0">
+            <a:noFill/>
+            <a:prstDash val="solid"/>
+          </a:ln>
+        </p:spPr>
+        <p:txBody>
+          <a:bodyPr xmlns:a="http://schemas.openxmlformats.org/drawingml/2006/main" wrap="none" lIns="0" tIns="0" rIns="0" bIns="0" anchor="ctr">
+            <a:normAutofit fontScale="100000"/>
+          </a:bodyPr>
+          <a:lstStyle xmlns:a="http://schemas.openxmlformats.org/drawingml/2006/main"/>
+          <a:p xmlns:a="http://schemas.openxmlformats.org/drawingml/2006/main">
+            <a:pPr algn="l">
+              <a:lnSpc>
+                <a:spcPct val="100000"/>
+              </a:lnSpc>
+              <a:buNone/>
+              <a:defRPr sz="4800" b="1">
+                <a:solidFill>
+                  <a:srgbClr val="051C2A"/>
+                </a:solidFill>
+                <a:latin typeface="Calibri"/>
+                <a:ea typeface="Calibri"/>
+                <a:cs typeface="Calibri"/>
+              </a:defRPr>
+            </a:pPr>
+            <a:r>
+              <a:rPr sz="4800" b="1">
+                <a:solidFill>
+                  <a:srgbClr val="051C2A"/>
+                </a:solidFill>
+                <a:latin typeface="Calibri"/>
+                <a:ea typeface="Calibri"/>
+                <a:cs typeface="Calibri"/>
+              </a:rPr>
+              <a:t>Answers</a:t>
+            </a:r>
+          </a:p>
+        </p:txBody>
+      </p:sp>
+      <p:sp>
+        <p:nvSpPr>
+          <p:cNvPr id="4" name="">
+            <a:extLst xmlns:a="http://schemas.openxmlformats.org/drawingml/2006/main">
+              <a:ext uri="{FF2B5EF4-FFF2-40B4-BE49-F238E27FC236}">
+                <a16:creationId xmlns:a16="http://schemas.microsoft.com/office/drawing/2014/main" id="{601F96F8-8EA3-4B69-A3AF-EBD5CBCD09C1}"/>
+              </a:ext>
+            </a:extLst>
+          </p:cNvPr>
+          <p:cNvSpPr>
+            <a:spLocks xmlns:a="http://schemas.openxmlformats.org/drawingml/2006/main" noGrp="1"/>
+          </p:cNvSpPr>
+          <p:nvPr/>
+        </p:nvSpPr>
+        <p:spPr>
+          <a:xfrm xmlns:a="http://schemas.openxmlformats.org/drawingml/2006/main">
+            <a:off x="971550" y="3562350"/>
+            <a:ext cx="11239500" cy="514350"/>
+          </a:xfrm>
+          <a:prstGeom xmlns:a="http://schemas.openxmlformats.org/drawingml/2006/main" prst="rect">
+            <a:avLst/>
+          </a:prstGeom>
+          <a:noFill xmlns:a="http://schemas.openxmlformats.org/drawingml/2006/main"/>
+          <a:ln xmlns:a="http://schemas.openxmlformats.org/drawingml/2006/main" w="0">
+            <a:noFill/>
+            <a:prstDash val="solid"/>
+          </a:ln>
+        </p:spPr>
+        <p:txBody>
+          <a:bodyPr xmlns:a="http://schemas.openxmlformats.org/drawingml/2006/main" wrap="square" lIns="0" tIns="0" rIns="0" bIns="0" anchor="ctr">
+            <a:normAutofit fontScale="100000"/>
+          </a:bodyPr>
+          <a:lstStyle xmlns:a="http://schemas.openxmlformats.org/drawingml/2006/main"/>
+          <a:p xmlns:a="http://schemas.openxmlformats.org/drawingml/2006/main">
+            <a:pPr algn="l">
+              <a:lnSpc>
+                <a:spcPct val="100000"/>
+              </a:lnSpc>
+              <a:buNone/>
+              <a:defRPr sz="2400" b="0">
+                <a:solidFill>
+                  <a:srgbClr val="3F3F42"/>
+                </a:solidFill>
+                <a:latin typeface="Calibri"/>
+                <a:ea typeface="Calibri"/>
+                <a:cs typeface="Calibri"/>
+              </a:defRPr>
+            </a:pPr>
+            <a:r>
+              <a:rPr sz="2400" b="0">
+                <a:solidFill>
+                  <a:srgbClr val="3F3F42"/>
+                </a:solidFill>
+                <a:latin typeface="Calibri"/>
+                <a:ea typeface="Calibri"/>
+                <a:cs typeface="Calibri"/>
+              </a:rPr>
+              <a:t>Check the idea, not only the letter.</a:t>
+            </a:r>
+          </a:p>
+        </p:txBody>
+      </p:sp>
+      <p:sp>
+        <p:nvSpPr>
+          <p:cNvPr id="5" name="">
+            <a:extLst xmlns:a="http://schemas.openxmlformats.org/drawingml/2006/main">
+              <a:ext uri="{FF2B5EF4-FFF2-40B4-BE49-F238E27FC236}">
+                <a16:creationId xmlns:a16="http://schemas.microsoft.com/office/drawing/2014/main" id="{D4A6E89B-2708-4600-B820-727EF660DE6B}"/>
+              </a:ext>
+            </a:extLst>
+          </p:cNvPr>
+          <p:cNvSpPr>
+            <a:spLocks xmlns:a="http://schemas.openxmlformats.org/drawingml/2006/main" noGrp="1"/>
+          </p:cNvSpPr>
+          <p:nvPr/>
+        </p:nvSpPr>
+        <p:spPr>
+          <a:xfrm xmlns:a="http://schemas.openxmlformats.org/drawingml/2006/main">
+            <a:off x="971550" y="6477000"/>
+            <a:ext cx="9525000" cy="400050"/>
+          </a:xfrm>
+          <a:prstGeom xmlns:a="http://schemas.openxmlformats.org/drawingml/2006/main" prst="rect">
+            <a:avLst/>
+          </a:prstGeom>
+          <a:noFill xmlns:a="http://schemas.openxmlformats.org/drawingml/2006/main"/>
+          <a:ln xmlns:a="http://schemas.openxmlformats.org/drawingml/2006/main" w="0">
+            <a:noFill/>
+            <a:prstDash val="solid"/>
+          </a:ln>
+        </p:spPr>
+        <p:txBody>
+          <a:bodyPr xmlns:a="http://schemas.openxmlformats.org/drawingml/2006/main" wrap="square" lIns="0" tIns="0" rIns="0" bIns="0" anchor="ctr">
+            <a:normAutofit fontScale="100000"/>
+          </a:bodyPr>
+          <a:lstStyle xmlns:a="http://schemas.openxmlformats.org/drawingml/2006/main"/>
+          <a:p xmlns:a="http://schemas.openxmlformats.org/drawingml/2006/main">
+            <a:pPr algn="l">
+              <a:lnSpc>
+                <a:spcPct val="100000"/>
+              </a:lnSpc>
+              <a:buNone/>
+              <a:defRPr sz="1350" b="1">
+                <a:solidFill>
+                  <a:srgbClr val="1F40CB"/>
+                </a:solidFill>
+                <a:latin typeface="Calibri"/>
+                <a:ea typeface="Calibri"/>
+                <a:cs typeface="Calibri"/>
+              </a:defRPr>
+            </a:pPr>
+            <a:r>
+              <a:rPr sz="1350" b="1">
+                <a:solidFill>
+                  <a:srgbClr val="1F40CB"/>
+                </a:solidFill>
+                <a:latin typeface="Calibri"/>
+                <a:ea typeface="Calibri"/>
+                <a:cs typeface="Calibri"/>
+              </a:rPr>
+              <a:t>LESSON 10  ·  CORRECTION</a:t>
+            </a:r>
+          </a:p>
+        </p:txBody>
+      </p:sp>
+      <p:sp>
+        <p:nvSpPr>
+          <p:cNvPr id="6" name="">
+            <a:extLst xmlns:a="http://schemas.openxmlformats.org/drawingml/2006/main">
+              <a:ext uri="{FF2B5EF4-FFF2-40B4-BE49-F238E27FC236}">
+                <a16:creationId xmlns:a16="http://schemas.microsoft.com/office/drawing/2014/main" id="{053831D6-7D46-4F1A-929F-D2CAD97F1627}"/>
+              </a:ext>
+            </a:extLst>
+          </p:cNvPr>
+          <p:cNvSpPr>
+            <a:spLocks xmlns:a="http://schemas.openxmlformats.org/drawingml/2006/main" noGrp="1"/>
+          </p:cNvSpPr>
+          <p:nvPr/>
+        </p:nvSpPr>
+        <p:spPr>
+          <a:xfrm xmlns:a="http://schemas.openxmlformats.org/drawingml/2006/main">
+            <a:off x="971550" y="7067550"/>
+            <a:ext cx="4762500" cy="381000"/>
+          </a:xfrm>
+          <a:prstGeom xmlns:a="http://schemas.openxmlformats.org/drawingml/2006/main" prst="rect">
+            <a:avLst/>
+          </a:prstGeom>
+          <a:noFill xmlns:a="http://schemas.openxmlformats.org/drawingml/2006/main"/>
+          <a:ln xmlns:a="http://schemas.openxmlformats.org/drawingml/2006/main" w="0">
+            <a:noFill/>
+            <a:prstDash val="solid"/>
+          </a:ln>
+        </p:spPr>
+        <p:txBody>
+          <a:bodyPr xmlns:a="http://schemas.openxmlformats.org/drawingml/2006/main" wrap="square" lIns="0" tIns="0" rIns="0" bIns="0" anchor="ctr">
+            <a:normAutofit fontScale="100000"/>
+          </a:bodyPr>
+          <a:lstStyle xmlns:a="http://schemas.openxmlformats.org/drawingml/2006/main"/>
+          <a:p xmlns:a="http://schemas.openxmlformats.org/drawingml/2006/main">
+            <a:pPr algn="l">
+              <a:lnSpc>
+                <a:spcPct val="100000"/>
+              </a:lnSpc>
+              <a:buNone/>
+              <a:defRPr sz="1725" b="0">
+                <a:solidFill>
+                  <a:srgbClr val="051C2A"/>
+                </a:solidFill>
+                <a:latin typeface="Calibri"/>
+                <a:ea typeface="Calibri"/>
+                <a:cs typeface="Calibri"/>
+              </a:defRPr>
+            </a:pPr>
+            <a:r>
+              <a:rPr sz="1725" b="0">
+                <a:solidFill>
+                  <a:srgbClr val="051C2A"/>
+                </a:solidFill>
+                <a:latin typeface="Calibri"/>
+                <a:ea typeface="Calibri"/>
+                <a:cs typeface="Calibri"/>
+              </a:rPr>
+              <a:t>First Finance - Arnaud Demes</a:t>
+            </a:r>
+          </a:p>
+        </p:txBody>
+      </p:sp>
+      <p:sp>
+        <p:nvSpPr>
+          <p:cNvPr id="8" name="quiz-answer-1">
+            <a:extLst xmlns:a="http://schemas.openxmlformats.org/drawingml/2006/main">
+              <a:ext uri="{FF2B5EF4-FFF2-40B4-BE49-F238E27FC236}">
+                <a16:creationId xmlns:a16="http://schemas.microsoft.com/office/drawing/2014/main" id="{4366CD08-8A77-4911-8FD5-2D4CC876F568}"/>
+              </a:ext>
+            </a:extLst>
+          </p:cNvPr>
+          <p:cNvSpPr>
+            <a:spLocks xmlns:a="http://schemas.openxmlformats.org/drawingml/2006/main" noGrp="1"/>
+          </p:cNvSpPr>
+          <p:nvPr/>
+        </p:nvSpPr>
+        <p:spPr>
+          <a:xfrm xmlns:a="http://schemas.openxmlformats.org/drawingml/2006/main">
+            <a:off x="971550" y="4400550"/>
+            <a:ext cx="13296900" cy="285750"/>
+          </a:xfrm>
+          <a:prstGeom xmlns:a="http://schemas.openxmlformats.org/drawingml/2006/main" prst="rect">
+            <a:avLst/>
+          </a:prstGeom>
+          <a:noFill xmlns:a="http://schemas.openxmlformats.org/drawingml/2006/main"/>
+          <a:ln xmlns:a="http://schemas.openxmlformats.org/drawingml/2006/main" w="0">
+            <a:noFill/>
+            <a:prstDash val="solid"/>
+          </a:ln>
+        </p:spPr>
+        <p:txBody>
+          <a:bodyPr xmlns:a="http://schemas.openxmlformats.org/drawingml/2006/main"/>
+          <a:lstStyle xmlns:a="http://schemas.openxmlformats.org/drawingml/2006/main"/>
+          <a:p xmlns:a="http://schemas.openxmlformats.org/drawingml/2006/main">
+            <a:pPr>
+              <a:defRPr sz="1500" b="1">
+                <a:solidFill>
+                  <a:srgbClr val="1F40CB"/>
+                </a:solidFill>
+              </a:defRPr>
+            </a:pPr>
+            <a:r>
+              <a:rPr sz="1500" b="1">
+                <a:solidFill>
+                  <a:srgbClr val="1F40CB"/>
+                </a:solidFill>
+              </a:rPr>
+              <a:t>1. B. No</a:t>
+            </a:r>
+          </a:p>
+        </p:txBody>
+      </p:sp>
+      <p:sp>
+        <p:nvSpPr>
+          <p:cNvPr id="9" name="quiz-explanation-1">
+            <a:extLst xmlns:a="http://schemas.openxmlformats.org/drawingml/2006/main">
+              <a:ext uri="{FF2B5EF4-FFF2-40B4-BE49-F238E27FC236}">
+                <a16:creationId xmlns:a16="http://schemas.microsoft.com/office/drawing/2014/main" id="{2D7BF189-1B4B-4635-B45F-33B3FFB5B2A4}"/>
+              </a:ext>
+            </a:extLst>
+          </p:cNvPr>
+          <p:cNvSpPr>
+            <a:spLocks xmlns:a="http://schemas.openxmlformats.org/drawingml/2006/main" noGrp="1"/>
+          </p:cNvSpPr>
+          <p:nvPr/>
+        </p:nvSpPr>
+        <p:spPr>
+          <a:xfrm xmlns:a="http://schemas.openxmlformats.org/drawingml/2006/main">
+            <a:off x="1257300" y="4705350"/>
+            <a:ext cx="13011150" cy="247650"/>
+          </a:xfrm>
+          <a:prstGeom xmlns:a="http://schemas.openxmlformats.org/drawingml/2006/main" prst="rect">
+            <a:avLst/>
+          </a:prstGeom>
+          <a:noFill xmlns:a="http://schemas.openxmlformats.org/drawingml/2006/main"/>
+          <a:ln xmlns:a="http://schemas.openxmlformats.org/drawingml/2006/main" w="0">
+            <a:noFill/>
+            <a:prstDash val="solid"/>
+          </a:ln>
+        </p:spPr>
+        <p:txBody>
+          <a:bodyPr xmlns:a="http://schemas.openxmlformats.org/drawingml/2006/main"/>
+          <a:lstStyle xmlns:a="http://schemas.openxmlformats.org/drawingml/2006/main"/>
+          <a:p xmlns:a="http://schemas.openxmlformats.org/drawingml/2006/main">
+            <a:pPr>
+              <a:defRPr sz="1200" b="0">
+                <a:solidFill>
+                  <a:srgbClr val="334155"/>
+                </a:solidFill>
+              </a:defRPr>
+            </a:pPr>
+            <a:r>
+              <a:rPr sz="1200" b="0">
+                <a:solidFill>
+                  <a:srgbClr val="334155"/>
+                </a:solidFill>
+              </a:rPr>
+              <a:t>Discovery describes a capability; the host still validates and permits it.</a:t>
+            </a:r>
+          </a:p>
+        </p:txBody>
+      </p:sp>
+      <p:sp>
+        <p:nvSpPr>
+          <p:cNvPr id="10" name="quiz-answer-2">
+            <a:extLst xmlns:a="http://schemas.openxmlformats.org/drawingml/2006/main">
+              <a:ext uri="{FF2B5EF4-FFF2-40B4-BE49-F238E27FC236}">
+                <a16:creationId xmlns:a16="http://schemas.microsoft.com/office/drawing/2014/main" id="{A7EF8FC2-60BA-4323-A8C0-46E7819E1552}"/>
+              </a:ext>
+            </a:extLst>
+          </p:cNvPr>
+          <p:cNvSpPr>
+            <a:spLocks xmlns:a="http://schemas.openxmlformats.org/drawingml/2006/main" noGrp="1"/>
+          </p:cNvSpPr>
+          <p:nvPr/>
+        </p:nvSpPr>
+        <p:spPr>
+          <a:xfrm xmlns:a="http://schemas.openxmlformats.org/drawingml/2006/main">
+            <a:off x="971550" y="5086350"/>
+            <a:ext cx="13296900" cy="285750"/>
+          </a:xfrm>
+          <a:prstGeom xmlns:a="http://schemas.openxmlformats.org/drawingml/2006/main" prst="rect">
+            <a:avLst/>
+          </a:prstGeom>
+          <a:noFill xmlns:a="http://schemas.openxmlformats.org/drawingml/2006/main"/>
+          <a:ln xmlns:a="http://schemas.openxmlformats.org/drawingml/2006/main" w="0">
+            <a:noFill/>
+            <a:prstDash val="solid"/>
+          </a:ln>
+        </p:spPr>
+        <p:txBody>
+          <a:bodyPr xmlns:a="http://schemas.openxmlformats.org/drawingml/2006/main"/>
+          <a:lstStyle xmlns:a="http://schemas.openxmlformats.org/drawingml/2006/main"/>
+          <a:p xmlns:a="http://schemas.openxmlformats.org/drawingml/2006/main">
+            <a:pPr>
+              <a:defRPr sz="1500" b="1">
+                <a:solidFill>
+                  <a:srgbClr val="1F40CB"/>
+                </a:solidFill>
+              </a:defRPr>
+            </a:pPr>
+            <a:r>
+              <a:rPr sz="1500" b="1">
+                <a:solidFill>
+                  <a:srgbClr val="1F40CB"/>
+                </a:solidFill>
+              </a:rPr>
+              <a:t>2. A. Host</a:t>
+            </a:r>
+          </a:p>
+        </p:txBody>
+      </p:sp>
+      <p:sp>
+        <p:nvSpPr>
+          <p:cNvPr id="11" name="quiz-explanation-2">
+            <a:extLst xmlns:a="http://schemas.openxmlformats.org/drawingml/2006/main">
+              <a:ext uri="{FF2B5EF4-FFF2-40B4-BE49-F238E27FC236}">
+                <a16:creationId xmlns:a16="http://schemas.microsoft.com/office/drawing/2014/main" id="{560AE864-B571-4F92-BD00-23DCB84108CF}"/>
+              </a:ext>
+            </a:extLst>
+          </p:cNvPr>
+          <p:cNvSpPr>
+            <a:spLocks xmlns:a="http://schemas.openxmlformats.org/drawingml/2006/main" noGrp="1"/>
+          </p:cNvSpPr>
+          <p:nvPr/>
+        </p:nvSpPr>
+        <p:spPr>
+          <a:xfrm xmlns:a="http://schemas.openxmlformats.org/drawingml/2006/main">
+            <a:off x="1257300" y="5391150"/>
+            <a:ext cx="13011150" cy="247650"/>
+          </a:xfrm>
+          <a:prstGeom xmlns:a="http://schemas.openxmlformats.org/drawingml/2006/main" prst="rect">
+            <a:avLst/>
+          </a:prstGeom>
+          <a:noFill xmlns:a="http://schemas.openxmlformats.org/drawingml/2006/main"/>
+          <a:ln xmlns:a="http://schemas.openxmlformats.org/drawingml/2006/main" w="0">
+            <a:noFill/>
+            <a:prstDash val="solid"/>
+          </a:ln>
+        </p:spPr>
+        <p:txBody>
+          <a:bodyPr xmlns:a="http://schemas.openxmlformats.org/drawingml/2006/main"/>
+          <a:lstStyle xmlns:a="http://schemas.openxmlformats.org/drawingml/2006/main"/>
+          <a:p xmlns:a="http://schemas.openxmlformats.org/drawingml/2006/main">
+            <a:pPr>
+              <a:defRPr sz="1200" b="0">
+                <a:solidFill>
+                  <a:srgbClr val="334155"/>
+                </a:solidFill>
+              </a:defRPr>
+            </a:pPr>
+            <a:r>
+              <a:rPr sz="1200" b="0">
+                <a:solidFill>
+                  <a:srgbClr val="334155"/>
+                </a:solidFill>
+              </a:rPr>
+              <a:t>The host owns context, policy, evidence and the final response.</a:t>
+            </a:r>
+          </a:p>
+        </p:txBody>
+      </p:sp>
+      <p:sp>
+        <p:nvSpPr>
+          <p:cNvPr id="12" name="quiz-answer-3">
+            <a:extLst xmlns:a="http://schemas.openxmlformats.org/drawingml/2006/main">
+              <a:ext uri="{FF2B5EF4-FFF2-40B4-BE49-F238E27FC236}">
+                <a16:creationId xmlns:a16="http://schemas.microsoft.com/office/drawing/2014/main" id="{53160A10-5E9B-493D-8665-2591C9C94CD7}"/>
+              </a:ext>
+            </a:extLst>
+          </p:cNvPr>
+          <p:cNvSpPr>
+            <a:spLocks xmlns:a="http://schemas.openxmlformats.org/drawingml/2006/main" noGrp="1"/>
+          </p:cNvSpPr>
+          <p:nvPr/>
+        </p:nvSpPr>
+        <p:spPr>
+          <a:xfrm xmlns:a="http://schemas.openxmlformats.org/drawingml/2006/main">
+            <a:off x="971550" y="5772150"/>
+            <a:ext cx="13296900" cy="285750"/>
+          </a:xfrm>
+          <a:prstGeom xmlns:a="http://schemas.openxmlformats.org/drawingml/2006/main" prst="rect">
+            <a:avLst/>
+          </a:prstGeom>
+          <a:noFill xmlns:a="http://schemas.openxmlformats.org/drawingml/2006/main"/>
+          <a:ln xmlns:a="http://schemas.openxmlformats.org/drawingml/2006/main" w="0">
+            <a:noFill/>
+            <a:prstDash val="solid"/>
+          </a:ln>
+        </p:spPr>
+        <p:txBody>
+          <a:bodyPr xmlns:a="http://schemas.openxmlformats.org/drawingml/2006/main"/>
+          <a:lstStyle xmlns:a="http://schemas.openxmlformats.org/drawingml/2006/main"/>
+          <a:p xmlns:a="http://schemas.openxmlformats.org/drawingml/2006/main">
+            <a:pPr>
+              <a:defRPr sz="1500" b="1">
+                <a:solidFill>
+                  <a:srgbClr val="1F40CB"/>
+                </a:solidFill>
+              </a:defRPr>
+            </a:pPr>
+            <a:r>
+              <a:rPr sz="1500" b="1">
+                <a:solidFill>
+                  <a:srgbClr val="1F40CB"/>
+                </a:solidFill>
+              </a:rPr>
+              <a:t>3. A. Local transport</a:t>
+            </a:r>
+          </a:p>
+        </p:txBody>
+      </p:sp>
+      <p:sp>
+        <p:nvSpPr>
+          <p:cNvPr id="13" name="quiz-explanation-3">
+            <a:extLst xmlns:a="http://schemas.openxmlformats.org/drawingml/2006/main">
+              <a:ext uri="{FF2B5EF4-FFF2-40B4-BE49-F238E27FC236}">
+                <a16:creationId xmlns:a16="http://schemas.microsoft.com/office/drawing/2014/main" id="{75A39432-9EF2-4CF9-AE50-0504A75DF6AF}"/>
+              </a:ext>
+            </a:extLst>
+          </p:cNvPr>
+          <p:cNvSpPr>
+            <a:spLocks xmlns:a="http://schemas.openxmlformats.org/drawingml/2006/main" noGrp="1"/>
+          </p:cNvSpPr>
+          <p:nvPr/>
+        </p:nvSpPr>
+        <p:spPr>
+          <a:xfrm xmlns:a="http://schemas.openxmlformats.org/drawingml/2006/main">
+            <a:off x="1257300" y="6076950"/>
+            <a:ext cx="13011150" cy="247650"/>
+          </a:xfrm>
+          <a:prstGeom xmlns:a="http://schemas.openxmlformats.org/drawingml/2006/main" prst="rect">
+            <a:avLst/>
+          </a:prstGeom>
+          <a:noFill xmlns:a="http://schemas.openxmlformats.org/drawingml/2006/main"/>
+          <a:ln xmlns:a="http://schemas.openxmlformats.org/drawingml/2006/main" w="0">
+            <a:noFill/>
+            <a:prstDash val="solid"/>
+          </a:ln>
+        </p:spPr>
+        <p:txBody>
+          <a:bodyPr xmlns:a="http://schemas.openxmlformats.org/drawingml/2006/main"/>
+          <a:lstStyle xmlns:a="http://schemas.openxmlformats.org/drawingml/2006/main"/>
+          <a:p xmlns:a="http://schemas.openxmlformats.org/drawingml/2006/main">
+            <a:pPr>
+              <a:defRPr sz="1200" b="0">
+                <a:solidFill>
+                  <a:srgbClr val="334155"/>
+                </a:solidFill>
+              </a:defRPr>
+            </a:pPr>
+            <a:r>
+              <a:rPr sz="1200" b="0">
+                <a:solidFill>
+                  <a:srgbClr val="334155"/>
+                </a:solidFill>
+              </a:rPr>
+              <a:t>stdio carries protocol messages; it is not an authentication layer.</a:t>
+            </a:r>
+          </a:p>
+        </p:txBody>
+      </p:sp>
+    </p:spTree>
+    <p:extLst>
+      <p:ext uri="{BB962C8B-B14F-4D97-AF65-F5344CB8AC3E}">
+        <p14:creationId xmlns:p14="http://schemas.microsoft.com/office/powerpoint/2010/main" val="1316229138"/>
+      </p:ext>
+    </p:extLst>
+  </p:cSld>
+</p:sld>
+</file>
+
 <file path=ppt/slides/slide2.xml><?xml version="1.0" encoding="utf-8"?>
 <p:sld xmlns:p="http://schemas.openxmlformats.org/presentationml/2006/main">
   <p:cSld>
@@ -3362,7 +4898,7 @@
       </p:sp>
       <p:cxnSp>
         <p:nvCxnSpPr>
-          <p:cNvPr id="577" name=""/>
+          <p:cNvPr id="629" name=""/>
           <p:cNvCxnSpPr>
             <a:stCxn xmlns:a="http://schemas.openxmlformats.org/drawingml/2006/main" id="3" idx="3"/>
             <a:endCxn xmlns:a="http://schemas.openxmlformats.org/drawingml/2006/main" id="7" idx="1"/>
@@ -3388,7 +4924,7 @@
       </p:cxnSp>
       <p:cxnSp>
         <p:nvCxnSpPr>
-          <p:cNvPr id="578" name=""/>
+          <p:cNvPr id="630" name=""/>
           <p:cNvCxnSpPr>
             <a:stCxn xmlns:a="http://schemas.openxmlformats.org/drawingml/2006/main" id="7" idx="3"/>
             <a:endCxn xmlns:a="http://schemas.openxmlformats.org/drawingml/2006/main" id="11" idx="1"/>
@@ -3414,7 +4950,7 @@
       </p:cxnSp>
       <p:cxnSp>
         <p:nvCxnSpPr>
-          <p:cNvPr id="579" name=""/>
+          <p:cNvPr id="631" name=""/>
           <p:cNvCxnSpPr>
             <a:stCxn xmlns:a="http://schemas.openxmlformats.org/drawingml/2006/main" id="11" idx="3"/>
             <a:endCxn xmlns:a="http://schemas.openxmlformats.org/drawingml/2006/main" id="15" idx="1"/>
@@ -3440,7 +4976,7 @@
       </p:cxnSp>
       <p:cxnSp>
         <p:nvCxnSpPr>
-          <p:cNvPr id="580" name=""/>
+          <p:cNvPr id="632" name=""/>
           <p:cNvCxnSpPr>
             <a:stCxn xmlns:a="http://schemas.openxmlformats.org/drawingml/2006/main" id="15" idx="3"/>
             <a:endCxn xmlns:a="http://schemas.openxmlformats.org/drawingml/2006/main" id="19" idx="1"/>
@@ -4758,7 +6294,7 @@
       </p:sp>
       <p:cxnSp>
         <p:nvCxnSpPr>
-          <p:cNvPr id="320" name=""/>
+          <p:cNvPr id="348" name=""/>
           <p:cNvCxnSpPr>
             <a:stCxn xmlns:a="http://schemas.openxmlformats.org/drawingml/2006/main" id="3" idx="3"/>
             <a:endCxn xmlns:a="http://schemas.openxmlformats.org/drawingml/2006/main" id="6" idx="1"/>
@@ -4784,7 +6320,7 @@
       </p:cxnSp>
       <p:cxnSp>
         <p:nvCxnSpPr>
-          <p:cNvPr id="321" name=""/>
+          <p:cNvPr id="349" name=""/>
           <p:cNvCxnSpPr>
             <a:stCxn xmlns:a="http://schemas.openxmlformats.org/drawingml/2006/main" id="6" idx="3"/>
             <a:endCxn xmlns:a="http://schemas.openxmlformats.org/drawingml/2006/main" id="10" idx="1"/>
@@ -10320,7 +11856,7 @@
       </p:sp>
       <p:cxnSp>
         <p:nvCxnSpPr>
-          <p:cNvPr id="577" name=""/>
+          <p:cNvPr id="629" name=""/>
           <p:cNvCxnSpPr>
             <a:stCxn xmlns:a="http://schemas.openxmlformats.org/drawingml/2006/main" id="3" idx="3"/>
             <a:endCxn xmlns:a="http://schemas.openxmlformats.org/drawingml/2006/main" id="7" idx="1"/>
@@ -10346,7 +11882,7 @@
       </p:cxnSp>
       <p:cxnSp>
         <p:nvCxnSpPr>
-          <p:cNvPr id="578" name=""/>
+          <p:cNvPr id="630" name=""/>
           <p:cNvCxnSpPr>
             <a:stCxn xmlns:a="http://schemas.openxmlformats.org/drawingml/2006/main" id="7" idx="3"/>
             <a:endCxn xmlns:a="http://schemas.openxmlformats.org/drawingml/2006/main" id="11" idx="1"/>
@@ -10372,7 +11908,7 @@
       </p:cxnSp>
       <p:cxnSp>
         <p:nvCxnSpPr>
-          <p:cNvPr id="579" name=""/>
+          <p:cNvPr id="631" name=""/>
           <p:cNvCxnSpPr>
             <a:stCxn xmlns:a="http://schemas.openxmlformats.org/drawingml/2006/main" id="11" idx="3"/>
             <a:endCxn xmlns:a="http://schemas.openxmlformats.org/drawingml/2006/main" id="15" idx="1"/>
@@ -10398,7 +11934,7 @@
       </p:cxnSp>
       <p:cxnSp>
         <p:nvCxnSpPr>
-          <p:cNvPr id="580" name=""/>
+          <p:cNvPr id="632" name=""/>
           <p:cNvCxnSpPr>
             <a:stCxn xmlns:a="http://schemas.openxmlformats.org/drawingml/2006/main" id="15" idx="3"/>
             <a:endCxn xmlns:a="http://schemas.openxmlformats.org/drawingml/2006/main" id="19" idx="1"/>
@@ -12121,7 +13657,7 @@
       </p:sp>
       <p:cxnSp>
         <p:nvCxnSpPr>
-          <p:cNvPr id="577" name=""/>
+          <p:cNvPr id="629" name=""/>
           <p:cNvCxnSpPr>
             <a:stCxn xmlns:a="http://schemas.openxmlformats.org/drawingml/2006/main" id="3" idx="3"/>
             <a:endCxn xmlns:a="http://schemas.openxmlformats.org/drawingml/2006/main" id="7" idx="1"/>
@@ -12147,7 +13683,7 @@
       </p:cxnSp>
       <p:cxnSp>
         <p:nvCxnSpPr>
-          <p:cNvPr id="578" name=""/>
+          <p:cNvPr id="630" name=""/>
           <p:cNvCxnSpPr>
             <a:stCxn xmlns:a="http://schemas.openxmlformats.org/drawingml/2006/main" id="7" idx="3"/>
             <a:endCxn xmlns:a="http://schemas.openxmlformats.org/drawingml/2006/main" id="11" idx="1"/>
@@ -12173,7 +13709,7 @@
       </p:cxnSp>
       <p:cxnSp>
         <p:nvCxnSpPr>
-          <p:cNvPr id="579" name=""/>
+          <p:cNvPr id="631" name=""/>
           <p:cNvCxnSpPr>
             <a:stCxn xmlns:a="http://schemas.openxmlformats.org/drawingml/2006/main" id="11" idx="3"/>
             <a:endCxn xmlns:a="http://schemas.openxmlformats.org/drawingml/2006/main" id="15" idx="1"/>
@@ -12199,7 +13735,7 @@
       </p:cxnSp>
       <p:cxnSp>
         <p:nvCxnSpPr>
-          <p:cNvPr id="580" name=""/>
+          <p:cNvPr id="632" name=""/>
           <p:cNvCxnSpPr>
             <a:stCxn xmlns:a="http://schemas.openxmlformats.org/drawingml/2006/main" id="15" idx="3"/>
             <a:endCxn xmlns:a="http://schemas.openxmlformats.org/drawingml/2006/main" id="19" idx="1"/>
@@ -15297,7 +16833,7 @@
       </p:sp>
       <p:cxnSp>
         <p:nvCxnSpPr>
-          <p:cNvPr id="320" name=""/>
+          <p:cNvPr id="348" name=""/>
           <p:cNvCxnSpPr>
             <a:stCxn xmlns:a="http://schemas.openxmlformats.org/drawingml/2006/main" id="3" idx="3"/>
             <a:endCxn xmlns:a="http://schemas.openxmlformats.org/drawingml/2006/main" id="6" idx="1"/>
@@ -15323,7 +16859,7 @@
       </p:cxnSp>
       <p:cxnSp>
         <p:nvCxnSpPr>
-          <p:cNvPr id="321" name=""/>
+          <p:cNvPr id="349" name=""/>
           <p:cNvCxnSpPr>
             <a:stCxn xmlns:a="http://schemas.openxmlformats.org/drawingml/2006/main" id="6" idx="3"/>
             <a:endCxn xmlns:a="http://schemas.openxmlformats.org/drawingml/2006/main" id="10" idx="1"/>
